--- a/demos/calgary-transit/web/public/downloads/data-product-case-study.pptx
+++ b/demos/calgary-transit/web/public/downloads/data-product-case-study.pptx
@@ -871,7 +871,8 @@
           <a:p>
             <a:r>
               <a:rPr lang="en-US" dirty="0"/>
-              <a:t>• Fifteen seconds. Every slide title is one of their questions.</a:t>
+              <a:t>• Fifteen seconds. Every slide title is one of their questions.
+• Say: 'Then five minutes live, on City of Calgary open data.'</a:t>
             </a:r>
             <a:endParaRPr lang="en-US" dirty="0"/>
           </a:p>

--- a/demos/calgary-transit/web/public/downloads/data-product-case-study.pptx
+++ b/demos/calgary-transit/web/public/downloads/data-product-case-study.pptx
@@ -1139,7 +1139,8 @@
           <a:p>
             <a:r>
               <a:rPr lang="en-US" dirty="0"/>
-              <a:t>• The technical heart: 'An AI that guesses the grain double counts. One grain per model means it can't.'
+              <a:t>• Three ways in, one source of truth. Most people never open a new tool: the data comes to the CRM.
+• The technical point on AI: 'An AI that guesses the grain double counts. One grain per model means it can't.'
 • Shipped first as an internal Customer Success bot; I led discovery for the client-facing version.
 • The example question is illustrative. [Your story: a real question the bot answered.]</a:t>
             </a:r>
@@ -1496,7 +1497,8 @@
           <a:p>
             <a:r>
               <a:rPr lang="en-US" dirty="0"/>
-              <a:t>• Slow down. This is the line to remember.
+              <a:t>• Trace the route once: 'An AI that guesses the grain double counts. The semantic layer sends each question to the model with the right grain, so it matches BI.'
+• Then land the banner slowly. It's the line to remember.
 • [Your story: the first time a team trusted an answer without double-checking it.]</a:t>
             </a:r>
             <a:endParaRPr lang="en-US" dirty="0"/>

--- a/demos/calgary-transit/web/public/downloads/data-product-case-study.pptx
+++ b/demos/calgary-transit/web/public/downloads/data-product-case-study.pptx
@@ -16,10 +16,9 @@
     <p:sldId id="264" r:id="rId10"/>
     <p:sldId id="265" r:id="rId11"/>
     <p:sldId id="266" r:id="rId12"/>
-    <p:sldId id="267" r:id="rId13"/>
   </p:sldIdLst>
   <p:notesMasterIdLst>
-    <p:notesMasterId r:id="rId14"/>
+    <p:notesMasterId r:id="rId13"/>
   </p:notesMasterIdLst>
   <p:sldSz cx="9144000" cy="5143500"/>
   <p:notesSz cx="5143500" cy="9144000"/>
@@ -601,8 +600,7 @@
           <a:p>
             <a:r>
               <a:rPr lang="en-US" dirty="0"/>
-              <a:t>• [Your story: swap in whatever you'd genuinely do differently.]
-• Transition: 'I can't show you StellarAlgo's data, so I rebuilt the same approach on the City's open data.'</a:t>
+              <a:t>• [Your story: swap in whatever you'd genuinely do differently.]</a:t>
             </a:r>
             <a:endParaRPr lang="en-US" dirty="0"/>
           </a:p>
@@ -690,12 +688,13 @@
           <a:p>
             <a:r>
               <a:rPr lang="en-US" dirty="0"/>
-              <a:t>• LIVE (5 min). Open the site before the interview. If the internet fails, these screenshots carry it.
+              <a:t>• Read the line on the slide, then switch to the browser.
+• LIVE DEMO (5 min). Have codychandler.ca/data-demos/calgary-transit open in a tab. Backup if the internet fails: the local copy (npm run dev).
 • 1 · Approach page, lineage graph: 'Same layers as StellarAlgo: three City datasets, tested in dbt, run daily by Airflow.' (45 s)
 • 2 · Dashboard: read the ⓘ headline. Then the 311 chart: 'My first cut said complaints per trip were up 43%. Lost Property moved into 311 in 2021. I fixed it once, in the data, so every consumer gets it right. Like for like it's 12%.' (1.25 min)
 • 3 · Predict: Advertising and Communications (usually low), then Transit Pass Programs (usually high). 'Tested on 2025, a year it never saw, it catches more slow requests than the rule of thumb.' (1 min)
 • 4 · Ask: 'How has ridership recovered since the pandemic?' While it works: 'it writes SQL against the same gold tables.' Read the answer, glance at the chart, open 'Show how this was answered'. Payoff: 'Same number as the dashboard. One source of truth.' (1.5 min)
-• Close: 'That's the work I'd bring to the City.' Then the last slide.</a:t>
+• Close: 'That's the work I'd bring to the City.' Then: 'Happy to take questions.'</a:t>
             </a:r>
             <a:endParaRPr lang="en-US" dirty="0"/>
           </a:p>
@@ -719,94 +718,6 @@
             <a:fld id="{F7021451-1387-4CA6-816F-3879F97B5CBC}" type="slidenum">
               <a:rPr lang="en-US"/>
               <a:t>11</a:t>
-            </a:fld>
-            <a:endParaRPr lang="en-US"/>
-          </a:p>
-        </p:txBody>
-      </p:sp>
-    </p:spTree>
-    <p:extLst>
-      <p:ext uri="{BB962C8B-B14F-4D97-AF65-F5344CB8AC3E}">
-        <p14:creationId xmlns:p14="http://schemas.microsoft.com/office/powerpoint/2010/main" val="1024086991"/>
-      </p:ext>
-    </p:extLst>
-  </p:cSld>
-  <p:clrMapOvr>
-    <a:masterClrMapping/>
-  </p:clrMapOvr>
-</p:notes>
-</file>
-
-<file path=ppt/notesSlides/notesSlide12.xml><?xml version="1.0" encoding="utf-8"?>
-<p:notes xmlns:a="http://schemas.openxmlformats.org/drawingml/2006/main" xmlns:r="http://schemas.openxmlformats.org/officeDocument/2006/relationships" xmlns:p="http://schemas.openxmlformats.org/presentationml/2006/main">
-  <p:cSld>
-    <p:spTree>
-      <p:nvGrpSpPr>
-        <p:cNvPr id="1" name=""/>
-        <p:cNvGrpSpPr/>
-        <p:nvPr/>
-      </p:nvGrpSpPr>
-      <p:grpSpPr>
-        <a:xfrm>
-          <a:off x="0" y="0"/>
-          <a:ext cx="0" cy="0"/>
-          <a:chOff x="0" y="0"/>
-          <a:chExt cx="0" cy="0"/>
-        </a:xfrm>
-      </p:grpSpPr>
-      <p:sp>
-        <p:nvSpPr>
-          <p:cNvPr id="2" name="Slide Image Placeholder 1"/>
-          <p:cNvSpPr>
-            <a:spLocks noGrp="1" noRot="1" noChangeAspect="1"/>
-          </p:cNvSpPr>
-          <p:nvPr>
-            <p:ph type="sldImg"/>
-          </p:nvPr>
-        </p:nvSpPr>
-        <p:spPr/>
-      </p:sp>
-      <p:sp>
-        <p:nvSpPr>
-          <p:cNvPr id="3" name="Notes Placeholder 2"/>
-          <p:cNvSpPr>
-            <a:spLocks noGrp="1"/>
-          </p:cNvSpPr>
-          <p:nvPr>
-            <p:ph type="body" idx="1"/>
-          </p:nvPr>
-        </p:nvSpPr>
-        <p:spPr/>
-        <p:txBody>
-          <a:bodyPr/>
-          <a:lstStyle/>
-          <a:p>
-            <a:r>
-              <a:rPr lang="en-US" dirty="0"/>
-              <a:t>• Stop talking. Leave this up for questions.</a:t>
-            </a:r>
-            <a:endParaRPr lang="en-US" dirty="0"/>
-          </a:p>
-        </p:txBody>
-      </p:sp>
-      <p:sp>
-        <p:nvSpPr>
-          <p:cNvPr id="4" name="Slide Number Placeholder 3"/>
-          <p:cNvSpPr>
-            <a:spLocks noGrp="1"/>
-          </p:cNvSpPr>
-          <p:nvPr>
-            <p:ph type="sldNum" sz="quarter" idx="10"/>
-          </p:nvPr>
-        </p:nvSpPr>
-        <p:spPr/>
-        <p:txBody>
-          <a:bodyPr/>
-          <a:lstStyle/>
-          <a:p>
-            <a:fld id="{F7021451-1387-4CA6-816F-3879F97B5CBC}" type="slidenum">
-              <a:rPr lang="en-US"/>
-              <a:t>12</a:t>
             </a:fld>
             <a:endParaRPr lang="en-US"/>
           </a:p>
@@ -1230,7 +1141,8 @@
           <a:p>
             <a:r>
               <a:rPr lang="en-US" dirty="0"/>
-              <a:t>• Ten seconds per number. The banner is the answer to question 1.
+              <a:t>• Ten seconds per card. The banner is the answer to question 1.
+• Observable: freshness checked against each domain's target, dbt tests on every run, AI-written digests of pipeline errors, and cost tracked per model.
 • [Your story: an adoption or time-saved number.]</a:t>
             </a:r>
             <a:endParaRPr lang="en-US" dirty="0"/>
@@ -1320,6 +1232,7 @@
             <a:r>
               <a:rPr lang="en-US" dirty="0"/>
               <a:t>• One breath across the strip. The why matters more than the stack.
+• On b, say it plainly: 'Modelled in dbt, stored in Snowflake, orchestrated in Airflow, every change versioned in GitHub and documented in dbt docs and Confluence.'
 • [Your story: how you ran requirements, and the real build order.]</a:t>
             </a:r>
             <a:endParaRPr lang="en-US" dirty="0"/>
@@ -1966,55 +1879,6 @@
       <p:pic>
         <p:nvPicPr>
           <p:cNvPr id="2" name="Image 0" descr="Slide 11">    </p:cNvPr>
-          <p:cNvPicPr>
-            <a:picLocks noChangeAspect="1"/>
-          </p:cNvPicPr>
-          <p:nvPr/>
-        </p:nvPicPr>
-        <p:blipFill>
-          <a:blip r:embed="rId1"/>
-          <a:stretch>
-            <a:fillRect/>
-          </a:stretch>
-        </p:blipFill>
-        <p:spPr>
-          <a:xfrm>
-            <a:off x="0" y="0"/>
-            <a:ext cx="9144000" cy="5143500"/>
-          </a:xfrm>
-          <a:prstGeom prst="rect">
-            <a:avLst/>
-          </a:prstGeom>
-        </p:spPr>
-      </p:pic>
-    </p:spTree>
-  </p:cSld>
-  <p:clrMapOvr>
-    <a:masterClrMapping/>
-  </p:clrMapOvr>
-</p:sld>
-</file>
-
-<file path=ppt/slides/slide12.xml><?xml version="1.0" encoding="utf-8"?>
-<p:sld xmlns:a="http://schemas.openxmlformats.org/drawingml/2006/main" xmlns:r="http://schemas.openxmlformats.org/officeDocument/2006/relationships" xmlns:p="http://schemas.openxmlformats.org/presentationml/2006/main">
-  <p:cSld name="Slide 12">
-    <p:spTree>
-      <p:nvGrpSpPr>
-        <p:cNvPr id="1" name=""/>
-        <p:cNvGrpSpPr/>
-        <p:nvPr/>
-      </p:nvGrpSpPr>
-      <p:grpSpPr>
-        <a:xfrm>
-          <a:off x="0" y="0"/>
-          <a:ext cx="0" cy="0"/>
-          <a:chOff x="0" y="0"/>
-          <a:chExt cx="0" cy="0"/>
-        </a:xfrm>
-      </p:grpSpPr>
-      <p:pic>
-        <p:nvPicPr>
-          <p:cNvPr id="2" name="Image 0" descr="Slide 12">    </p:cNvPr>
           <p:cNvPicPr>
             <a:picLocks noChangeAspect="1"/>
           </p:cNvPicPr>

--- a/demos/calgary-transit/web/public/downloads/data-product-case-study.pptx
+++ b/demos/calgary-transit/web/public/downloads/data-product-case-study.pptx
@@ -961,7 +961,7 @@
           <a:p>
             <a:r>
               <a:rPr lang="en-US" dirty="0"/>
-              <a:t>• Left to right, once: three sources, transformed once, one set of shared metrics, every consumer.
+              <a:t>• Left to right, once: product analytics, customer data (ticketing, acquisition) and client config, transformed once, one set of shared metrics, every consumer.
 • Governance is built in: personal data masked on landing, access by role, and a data contract.</a:t>
             </a:r>
             <a:endParaRPr lang="en-US" dirty="0"/>

--- a/demos/calgary-transit/web/public/downloads/data-product-case-study.pptx
+++ b/demos/calgary-transit/web/public/downloads/data-product-case-study.pptx
@@ -600,7 +600,8 @@
           <a:p>
             <a:r>
               <a:rPr lang="en-US" dirty="0"/>
-              <a:t>• [Your story: swap in whatever you'd genuinely do differently.]</a:t>
+              <a:t>• [Your story: swap in whatever you'd genuinely do differently.]
+• Land the City line slowly. It's the bridge to the role, and the lead-in to the demo.</a:t>
             </a:r>
             <a:endParaRPr lang="en-US" dirty="0"/>
           </a:p>
@@ -1050,7 +1051,7 @@
           <a:p>
             <a:r>
               <a:rPr lang="en-US" dirty="0"/>
-              <a:t>• Three ways in, one source of truth. Most people never open a new tool: the data comes to the CRM.
+              <a:t>• Three ways to use the same tables. Most people never open a new tool: the data comes to them in the CRM.
 • The technical point on AI: 'An AI that guesses the grain double counts. One grain per model means it can't.'
 • Shipped first as an internal Customer Success bot; I led discovery for the client-facing version.
 • The example question is illustrative. [Your story: a real question the bot answered.]</a:t>

--- a/demos/calgary-transit/web/public/downloads/data-product-case-study.pptx
+++ b/demos/calgary-transit/web/public/downloads/data-product-case-study.pptx
@@ -962,7 +962,7 @@
           <a:p>
             <a:r>
               <a:rPr lang="en-US" dirty="0"/>
-              <a:t>• Left to right, once: product analytics, customer data (ticketing, acquisition) and client config, transformed once, one set of shared metrics, every consumer.
+              <a:t>• Left to right, once: product analytics, customer data (ticketing, acquisition) and client config, with every metric defined once in dbt, feeding every consumer.
 • Governance is built in: personal data masked on landing, access by role, and a data contract.</a:t>
             </a:r>
             <a:endParaRPr lang="en-US" dirty="0"/>

--- a/demos/calgary-transit/web/public/downloads/data-product-case-study.pptx
+++ b/demos/calgary-transit/web/public/downloads/data-product-case-study.pptx
@@ -601,7 +601,7 @@
             <a:r>
               <a:rPr lang="en-US" dirty="0"/>
               <a:t>• [Your story: swap in whatever you'd genuinely do differently.]
-• Land the City line slowly. It's the bridge to the role, and the lead-in to the demo.</a:t>
+• Then go straight to the thank-you slide and the demo.</a:t>
             </a:r>
             <a:endParaRPr lang="en-US" dirty="0"/>
           </a:p>

--- a/demos/calgary-transit/web/public/downloads/data-product-case-study.pptx
+++ b/demos/calgary-transit/web/public/downloads/data-product-case-study.pptx
@@ -512,7 +512,7 @@
           <a:p>
             <a:r>
               <a:rPr lang="en-US" dirty="0"/>
-              <a:t>• [Your story: one line on who you are.] Then: 'I'll answer your six questions in order, then show it live.'</a:t>
+              <a:t/>
             </a:r>
             <a:endParaRPr lang="en-US" dirty="0"/>
           </a:p>
@@ -600,8 +600,7 @@
           <a:p>
             <a:r>
               <a:rPr lang="en-US" dirty="0"/>
-              <a:t>• [Your story: swap in whatever you'd genuinely do differently.]
-• Then go straight to the thank-you slide and the demo.</a:t>
+              <a:t/>
             </a:r>
             <a:endParaRPr lang="en-US" dirty="0"/>
           </a:p>
@@ -689,13 +688,7 @@
           <a:p>
             <a:r>
               <a:rPr lang="en-US" dirty="0"/>
-              <a:t>• Read the line on the slide, then switch to the browser.
-• LIVE DEMO (5 min). Have codychandler.ca/data-demos/calgary-transit open in a tab. Backup if the internet fails: the local copy (npm run dev).
-• 1 · Approach page, lineage graph: 'Same layers as StellarAlgo: three City datasets, tested in dbt, run daily by Airflow.' (45 s)
-• 2 · Dashboard: read the ⓘ headline. Then the 311 chart: 'My first cut said complaints per trip were up 43%. Lost Property moved into 311 in 2021. I fixed it once, in the data, so every consumer gets it right. Like for like it's 12%.' (1.25 min)
-• 3 · Predict: Advertising and Communications (usually low), then Transit Pass Programs (usually high). 'Tested on 2025, a year it never saw, it catches more slow requests than the rule of thumb.' (1 min)
-• 4 · Ask: 'How has ridership recovered since the pandemic?' While it works: 'it writes SQL against the same gold tables.' Read the answer, glance at the chart, open 'Show how this was answered'. Payoff: 'Same number as the dashboard. One source of truth.' (1.5 min)
-• Close: 'That's the work I'd bring to the City.' Then: 'Happy to take questions.'</a:t>
+              <a:t/>
             </a:r>
             <a:endParaRPr lang="en-US" dirty="0"/>
           </a:p>
@@ -783,8 +776,7 @@
           <a:p>
             <a:r>
               <a:rPr lang="en-US" dirty="0"/>
-              <a:t>• Fifteen seconds. Every slide title is one of their questions.
-• Say: 'Then five minutes live, on City of Calgary open data.'</a:t>
+              <a:t/>
             </a:r>
             <a:endParaRPr lang="en-US" dirty="0"/>
           </a:p>
@@ -872,9 +864,7 @@
           <a:p>
             <a:r>
               <a:rPr lang="en-US" dirty="0"/>
-              <a:t>• Keep it to the business pain, not the tech.
-• My role: Director, Product Innovation &amp; Analytics. I owned the product from planning to general availability.
-• [Your story: one concrete moment when inconsistent numbers hurt.]</a:t>
+              <a:t/>
             </a:r>
             <a:endParaRPr lang="en-US" dirty="0"/>
           </a:p>
@@ -962,8 +952,7 @@
           <a:p>
             <a:r>
               <a:rPr lang="en-US" dirty="0"/>
-              <a:t>• Left to right, once: product analytics, customer data (ticketing, acquisition) and client config, with every metric defined once in dbt, feeding every consumer.
-• Governance is built in: personal data masked on landing, access by role, and a data contract.</a:t>
+              <a:t/>
             </a:r>
             <a:endParaRPr lang="en-US" dirty="0"/>
           </a:p>
@@ -1051,10 +1040,7 @@
           <a:p>
             <a:r>
               <a:rPr lang="en-US" dirty="0"/>
-              <a:t>• Three ways to use the same tables. Most people never open a new tool: the data comes to them in the CRM.
-• The technical point on AI: 'An AI that guesses the grain double counts. One grain per model means it can't.'
-• Shipped first as an internal Customer Success bot; I led discovery for the client-facing version.
-• The example question is illustrative. [Your story: a real question the bot answered.]</a:t>
+              <a:t/>
             </a:r>
             <a:endParaRPr lang="en-US" dirty="0"/>
           </a:p>
@@ -1142,9 +1128,7 @@
           <a:p>
             <a:r>
               <a:rPr lang="en-US" dirty="0"/>
-              <a:t>• Ten seconds per card. The banner is the answer to question 1.
-• Observable: freshness checked against each domain's target, dbt tests on every run, AI-written digests of pipeline errors, and cost tracked per model.
-• [Your story: an adoption or time-saved number.]</a:t>
+              <a:t/>
             </a:r>
             <a:endParaRPr lang="en-US" dirty="0"/>
           </a:p>
@@ -1232,9 +1216,7 @@
           <a:p>
             <a:r>
               <a:rPr lang="en-US" dirty="0"/>
-              <a:t>• One breath across the strip. The why matters more than the stack.
-• On b, say it plainly: 'Modelled in dbt, stored in Snowflake, orchestrated in Airflow, every change versioned in GitHub and documented in dbt docs and Confluence.'
-• [Your story: how you ran requirements, and the real build order.]</a:t>
+              <a:t/>
             </a:r>
             <a:endParaRPr lang="en-US" dirty="0"/>
           </a:p>
@@ -1322,8 +1304,7 @@
           <a:p>
             <a:r>
               <a:rPr lang="en-US" dirty="0"/>
-              <a:t>• Spend most of the time on the People row. It's the one the City will relate to.
-• [Your story: the conversation that got the data contract agreed. Who pushed back, and what changed their mind?]</a:t>
+              <a:t/>
             </a:r>
             <a:endParaRPr lang="en-US" dirty="0"/>
           </a:p>
@@ -1411,9 +1392,7 @@
           <a:p>
             <a:r>
               <a:rPr lang="en-US" dirty="0"/>
-              <a:t>• Trace the route once: 'An AI that guesses the grain double counts. The semantic layer sends each question to the model with the right grain, so it matches BI.'
-• Then land the banner slowly. It's the line to remember.
-• [Your story: the first time a team trusted an answer without double-checking it.]</a:t>
+              <a:t/>
             </a:r>
             <a:endParaRPr lang="en-US" dirty="0"/>
           </a:p>
